--- a/topic08-higher-order-functions/unit-08a-lectures/talk-2/b-function-appl.pptx
+++ b/topic08-higher-order-functions/unit-08a-lectures/talk-2/b-function-appl.pptx
@@ -525,10 +525,10 @@
           </a:ln>
           <a:extLst>
             <a:ext uri="{FAA26D3D-D897-4be2-8F04-BA451C77F1D7}">
-              <ma14:placeholderFlag xmlns:ma14="http://schemas.microsoft.com/office/mac/drawingml/2011/main" xmlns="" val="1"/>
+              <ma14:placeholderFlag xmlns="" xmlns:ma14="http://schemas.microsoft.com/office/mac/drawingml/2011/main" val="1"/>
             </a:ext>
             <a:ext uri="{909E8E84-426E-40dd-AFC4-6F175D3DCCD1}">
-              <a14:hiddenFill xmlns:a14="http://schemas.microsoft.com/office/drawing/2010/main" xmlns="">
+              <a14:hiddenFill xmlns="" xmlns:a14="http://schemas.microsoft.com/office/drawing/2010/main">
                 <a:solidFill>
                   <a:srgbClr val="FFFFFF"/>
                 </a:solidFill>
@@ -1110,7 +1110,7 @@
             <a:fld id="{08B9EBBA-996F-894A-B54A-D6246ED52CEA}" type="datetimeFigureOut">
               <a:rPr lang="en-US" smtClean="0"/>
               <a:pPr/>
-              <a:t>3/17/25</a:t>
+              <a:t>3/7/26</a:t>
             </a:fld>
             <a:endParaRPr lang="en-US" dirty="0"/>
           </a:p>
@@ -1532,7 +1532,7 @@
             <a:fld id="{09B482E8-6E0E-1B4F-B1FD-C69DB9E858D9}" type="datetimeFigureOut">
               <a:rPr lang="en-US" smtClean="0"/>
               <a:pPr/>
-              <a:t>3/17/25</a:t>
+              <a:t>3/7/26</a:t>
             </a:fld>
             <a:endParaRPr lang="en-US" dirty="0"/>
           </a:p>
@@ -1876,7 +1876,7 @@
             <a:fld id="{09B482E8-6E0E-1B4F-B1FD-C69DB9E858D9}" type="datetimeFigureOut">
               <a:rPr lang="en-US" smtClean="0"/>
               <a:pPr/>
-              <a:t>3/17/25</a:t>
+              <a:t>3/7/26</a:t>
             </a:fld>
             <a:endParaRPr lang="en-US" dirty="0"/>
           </a:p>
@@ -2289,7 +2289,7 @@
             <a:fld id="{09B482E8-6E0E-1B4F-B1FD-C69DB9E858D9}" type="datetimeFigureOut">
               <a:rPr lang="en-US" smtClean="0"/>
               <a:pPr/>
-              <a:t>3/17/25</a:t>
+              <a:t>3/7/26</a:t>
             </a:fld>
             <a:endParaRPr lang="en-US" dirty="0"/>
           </a:p>
@@ -2865,7 +2865,7 @@
             <a:fld id="{09B482E8-6E0E-1B4F-B1FD-C69DB9E858D9}" type="datetimeFigureOut">
               <a:rPr lang="en-US" smtClean="0"/>
               <a:pPr/>
-              <a:t>3/17/25</a:t>
+              <a:t>3/7/26</a:t>
             </a:fld>
             <a:endParaRPr lang="en-US" dirty="0"/>
           </a:p>
@@ -3554,7 +3554,7 @@
             <a:fld id="{09B482E8-6E0E-1B4F-B1FD-C69DB9E858D9}" type="datetimeFigureOut">
               <a:rPr lang="en-US" smtClean="0"/>
               <a:pPr/>
-              <a:t>3/17/25</a:t>
+              <a:t>3/7/26</a:t>
             </a:fld>
             <a:endParaRPr lang="en-US" dirty="0"/>
           </a:p>
@@ -4475,7 +4475,7 @@
             <a:fld id="{09B482E8-6E0E-1B4F-B1FD-C69DB9E858D9}" type="datetimeFigureOut">
               <a:rPr lang="en-US" smtClean="0"/>
               <a:pPr/>
-              <a:t>3/17/25</a:t>
+              <a:t>3/7/26</a:t>
             </a:fld>
             <a:endParaRPr lang="en-US" dirty="0"/>
           </a:p>
@@ -4796,7 +4796,7 @@
             <a:fld id="{09B482E8-6E0E-1B4F-B1FD-C69DB9E858D9}" type="datetimeFigureOut">
               <a:rPr lang="en-US" smtClean="0"/>
               <a:pPr/>
-              <a:t>3/17/25</a:t>
+              <a:t>3/7/26</a:t>
             </a:fld>
             <a:endParaRPr lang="en-US" dirty="0"/>
           </a:p>
@@ -5067,7 +5067,7 @@
             <a:fld id="{09B482E8-6E0E-1B4F-B1FD-C69DB9E858D9}" type="datetimeFigureOut">
               <a:rPr lang="en-US" smtClean="0"/>
               <a:pPr/>
-              <a:t>3/17/25</a:t>
+              <a:t>3/7/26</a:t>
             </a:fld>
             <a:endParaRPr lang="en-US" dirty="0"/>
           </a:p>
@@ -5265,6 +5265,13 @@
             <a:schemeClr val="lt1"/>
           </a:fontRef>
         </p:style>
+        <p:txBody>
+          <a:bodyPr/>
+          <a:lstStyle/>
+          <a:p>
+            <a:endParaRPr lang="en-US"/>
+          </a:p>
+        </p:txBody>
       </p:sp>
       <p:sp>
         <p:nvSpPr>
@@ -5303,6 +5310,13 @@
             <a:schemeClr val="lt1"/>
           </a:fontRef>
         </p:style>
+        <p:txBody>
+          <a:bodyPr/>
+          <a:lstStyle/>
+          <a:p>
+            <a:endParaRPr lang="en-US"/>
+          </a:p>
+        </p:txBody>
       </p:sp>
       <p:sp>
         <p:nvSpPr>
@@ -5397,7 +5411,7 @@
             <a:fld id="{09B482E8-6E0E-1B4F-B1FD-C69DB9E858D9}" type="datetimeFigureOut">
               <a:rPr lang="en-US" smtClean="0"/>
               <a:pPr/>
-              <a:t>3/17/25</a:t>
+              <a:t>3/7/26</a:t>
             </a:fld>
             <a:endParaRPr lang="en-US" dirty="0"/>
           </a:p>
@@ -5793,7 +5807,7 @@
             <a:fld id="{8DFA1846-DA80-1C48-A609-854EA85C59AD}" type="datetimeFigureOut">
               <a:rPr lang="en-US" smtClean="0"/>
               <a:pPr/>
-              <a:t>3/17/25</a:t>
+              <a:t>3/7/26</a:t>
             </a:fld>
             <a:endParaRPr lang="en-US" dirty="0"/>
           </a:p>
@@ -6176,7 +6190,7 @@
             <a:fld id="{09B482E8-6E0E-1B4F-B1FD-C69DB9E858D9}" type="datetimeFigureOut">
               <a:rPr lang="en-US" smtClean="0"/>
               <a:pPr/>
-              <a:t>3/17/25</a:t>
+              <a:t>3/7/26</a:t>
             </a:fld>
             <a:endParaRPr lang="en-US" dirty="0"/>
           </a:p>
@@ -6689,7 +6703,7 @@
             <a:fld id="{09B482E8-6E0E-1B4F-B1FD-C69DB9E858D9}" type="datetimeFigureOut">
               <a:rPr lang="en-US" smtClean="0"/>
               <a:pPr/>
-              <a:t>3/17/25</a:t>
+              <a:t>3/7/26</a:t>
             </a:fld>
             <a:endParaRPr lang="en-US" dirty="0"/>
           </a:p>
@@ -6873,6 +6887,13 @@
             <a:schemeClr val="lt1"/>
           </a:fontRef>
         </p:style>
+        <p:txBody>
+          <a:bodyPr/>
+          <a:lstStyle/>
+          <a:p>
+            <a:endParaRPr lang="en-US"/>
+          </a:p>
+        </p:txBody>
       </p:sp>
       <p:sp>
         <p:nvSpPr>
@@ -6911,6 +6932,13 @@
             <a:schemeClr val="lt1"/>
           </a:fontRef>
         </p:style>
+        <p:txBody>
+          <a:bodyPr/>
+          <a:lstStyle/>
+          <a:p>
+            <a:endParaRPr lang="en-US"/>
+          </a:p>
+        </p:txBody>
       </p:sp>
       <p:sp>
         <p:nvSpPr>
@@ -6953,7 +6981,7 @@
             <a:fld id="{F13A34C8-038E-2045-AF43-DF7DBB8E0E9E}" type="datetimeFigureOut">
               <a:rPr lang="en-US" smtClean="0"/>
               <a:pPr/>
-              <a:t>3/17/25</a:t>
+              <a:t>3/7/26</a:t>
             </a:fld>
             <a:endParaRPr lang="en-US" dirty="0"/>
           </a:p>
@@ -7104,6 +7132,13 @@
             <a:schemeClr val="lt1"/>
           </a:fontRef>
         </p:style>
+        <p:txBody>
+          <a:bodyPr/>
+          <a:lstStyle/>
+          <a:p>
+            <a:endParaRPr lang="en-US"/>
+          </a:p>
+        </p:txBody>
       </p:sp>
       <p:sp>
         <p:nvSpPr>
@@ -7123,7 +7158,7 @@
             <a:fld id="{8818C68F-D26B-8F47-958C-23B49CF8A634}" type="datetimeFigureOut">
               <a:rPr lang="en-US" smtClean="0"/>
               <a:pPr/>
-              <a:t>3/17/25</a:t>
+              <a:t>3/7/26</a:t>
             </a:fld>
             <a:endParaRPr lang="en-US" dirty="0"/>
           </a:p>
@@ -7520,7 +7555,7 @@
             <a:fld id="{09B482E8-6E0E-1B4F-B1FD-C69DB9E858D9}" type="datetimeFigureOut">
               <a:rPr lang="en-US" smtClean="0"/>
               <a:pPr/>
-              <a:t>3/17/25</a:t>
+              <a:t>3/7/26</a:t>
             </a:fld>
             <a:endParaRPr lang="en-US" dirty="0"/>
           </a:p>
@@ -7936,7 +7971,7 @@
             <a:fld id="{09B482E8-6E0E-1B4F-B1FD-C69DB9E858D9}" type="datetimeFigureOut">
               <a:rPr lang="en-US" smtClean="0"/>
               <a:pPr/>
-              <a:t>3/17/25</a:t>
+              <a:t>3/7/26</a:t>
             </a:fld>
             <a:endParaRPr lang="en-US" dirty="0"/>
           </a:p>
@@ -8187,7 +8222,7 @@
             <a:fld id="{09B482E8-6E0E-1B4F-B1FD-C69DB9E858D9}" type="datetimeFigureOut">
               <a:rPr lang="en-US" smtClean="0"/>
               <a:pPr/>
-              <a:t>3/17/25</a:t>
+              <a:t>3/7/26</a:t>
             </a:fld>
             <a:endParaRPr lang="en-US" dirty="0"/>
           </a:p>
@@ -8624,14 +8659,14 @@
           <a:noFill/>
           <a:extLst>
             <a:ext uri="{909E8E84-426E-40dd-AFC4-6F175D3DCCD1}">
-              <a14:hiddenFill xmlns:a14="http://schemas.microsoft.com/office/drawing/2010/main" xmlns="">
+              <a14:hiddenFill xmlns="" xmlns:a14="http://schemas.microsoft.com/office/drawing/2010/main">
                 <a:solidFill>
                   <a:srgbClr val="FFFFFF"/>
                 </a:solidFill>
               </a14:hiddenFill>
             </a:ext>
             <a:ext uri="{91240B29-F687-4f45-9708-019B960494DF}">
-              <a14:hiddenLine xmlns:a14="http://schemas.microsoft.com/office/drawing/2010/main" xmlns="" w="9525">
+              <a14:hiddenLine xmlns="" xmlns:a14="http://schemas.microsoft.com/office/drawing/2010/main" w="9525">
                 <a:solidFill>
                   <a:srgbClr val="000000"/>
                 </a:solidFill>
@@ -8839,7 +8874,7 @@
               <a:rPr kumimoji="1" lang="en-US" sz="3200" dirty="0">
                 <a:cs typeface="+mn-cs"/>
               </a:rPr>
-              <a:t>Chapter 8.2 Function Application</a:t>
+              <a:t>Topic 8.2 Function Application</a:t>
             </a:r>
           </a:p>
         </p:txBody>
@@ -8879,14 +8914,14 @@
           </a:ln>
           <a:extLst>
             <a:ext uri="{909E8E84-426E-40dd-AFC4-6F175D3DCCD1}">
-              <a14:hiddenFill xmlns:a14="http://schemas.microsoft.com/office/drawing/2010/main" xmlns="">
+              <a14:hiddenFill xmlns="" xmlns:a14="http://schemas.microsoft.com/office/drawing/2010/main">
                 <a:solidFill>
                   <a:srgbClr val="FFFFFF"/>
                 </a:solidFill>
               </a14:hiddenFill>
             </a:ext>
             <a:ext uri="{91240B29-F687-4f45-9708-019B960494DF}">
-              <a14:hiddenLine xmlns:a14="http://schemas.microsoft.com/office/drawing/2010/main" xmlns="" w="9525">
+              <a14:hiddenLine xmlns="" xmlns:a14="http://schemas.microsoft.com/office/drawing/2010/main" w="9525">
                 <a:solidFill>
                   <a:srgbClr val="000000"/>
                 </a:solidFill>
@@ -8968,14 +9003,14 @@
           <a:noFill/>
           <a:extLst>
             <a:ext uri="{909E8E84-426E-40dd-AFC4-6F175D3DCCD1}">
-              <a14:hiddenFill xmlns:a14="http://schemas.microsoft.com/office/drawing/2010/main" xmlns="">
+              <a14:hiddenFill xmlns="" xmlns:a14="http://schemas.microsoft.com/office/drawing/2010/main">
                 <a:solidFill>
                   <a:srgbClr val="FFFFFF"/>
                 </a:solidFill>
               </a14:hiddenFill>
             </a:ext>
             <a:ext uri="{91240B29-F687-4f45-9708-019B960494DF}">
-              <a14:hiddenLine xmlns:a14="http://schemas.microsoft.com/office/drawing/2010/main" xmlns="" w="9525">
+              <a14:hiddenLine xmlns="" xmlns:a14="http://schemas.microsoft.com/office/drawing/2010/main" w="9525">
                 <a:solidFill>
                   <a:srgbClr val="000000"/>
                 </a:solidFill>
@@ -9195,7 +9230,7 @@
           </a:ln>
           <a:extLst>
             <a:ext uri="{91240B29-F687-4f45-9708-019B960494DF}">
-              <a14:hiddenLine xmlns="" xmlns:a14="http://schemas.microsoft.com/office/drawing/2010/main" w="12700" cap="sq">
+              <a14:hiddenLine xmlns:a14="http://schemas.microsoft.com/office/drawing/2010/main" xmlns="" w="12700" cap="sq">
                 <a:solidFill>
                   <a:srgbClr val="000000"/>
                 </a:solidFill>
@@ -9710,14 +9745,14 @@
           <a:noFill/>
           <a:extLst>
             <a:ext uri="{909E8E84-426E-40dd-AFC4-6F175D3DCCD1}">
-              <a14:hiddenFill xmlns:a14="http://schemas.microsoft.com/office/drawing/2010/main" xmlns="">
+              <a14:hiddenFill xmlns="" xmlns:a14="http://schemas.microsoft.com/office/drawing/2010/main">
                 <a:solidFill>
                   <a:srgbClr val="FFFFFF"/>
                 </a:solidFill>
               </a14:hiddenFill>
             </a:ext>
             <a:ext uri="{91240B29-F687-4f45-9708-019B960494DF}">
-              <a14:hiddenLine xmlns:a14="http://schemas.microsoft.com/office/drawing/2010/main" xmlns="" w="9525">
+              <a14:hiddenLine xmlns="" xmlns:a14="http://schemas.microsoft.com/office/drawing/2010/main" w="9525">
                 <a:solidFill>
                   <a:srgbClr val="000000"/>
                 </a:solidFill>
@@ -9888,7 +9923,14 @@
             </a:pPr>
             <a:r>
               <a:rPr lang="en-IE" sz="2800" dirty="0"/>
-              <a:t>normal function application has high precedence, $ has low precedence</a:t>
+              <a:t>normal function application has high precedence, </a:t>
+            </a:r>
+          </a:p>
+          <a:p>
+            <a:pPr lvl="1"/>
+            <a:r>
+              <a:rPr lang="en-IE" sz="2800" dirty="0"/>
+              <a:t>    $ has low precedence</a:t>
             </a:r>
           </a:p>
           <a:p>
@@ -9912,7 +9954,7 @@
             <a:pPr lvl="2"/>
             <a:r>
               <a:rPr lang="en-IE" sz="2800" dirty="0"/>
-              <a:t>f a b c === ((f a) b) c</a:t>
+              <a:t>      f a b c === ((f a) b) c</a:t>
             </a:r>
           </a:p>
           <a:p>
@@ -10084,7 +10126,7 @@
                                         <p:tgtEl>
                                           <p:spTgt spid="654339">
                                             <p:txEl>
-                                              <p:pRg st="3" end="3"/>
+                                              <p:pRg st="2" end="2"/>
                                             </p:txEl>
                                           </p:spTgt>
                                         </p:tgtEl>
@@ -10102,7 +10144,7 @@
                                         <p:tgtEl>
                                           <p:spTgt spid="654339">
                                             <p:txEl>
-                                              <p:pRg st="3" end="3"/>
+                                              <p:pRg st="2" end="2"/>
                                             </p:txEl>
                                           </p:spTgt>
                                         </p:tgtEl>
@@ -10129,92 +10171,7 @@
                                         <p:tgtEl>
                                           <p:spTgt spid="654339">
                                             <p:txEl>
-                                              <p:pRg st="3" end="3"/>
-                                            </p:txEl>
-                                          </p:spTgt>
-                                        </p:tgtEl>
-                                        <p:attrNameLst>
-                                          <p:attrName>ppt_y</p:attrName>
-                                        </p:attrNameLst>
-                                      </p:cBhvr>
-                                      <p:tavLst>
-                                        <p:tav tm="0">
-                                          <p:val>
-                                            <p:strVal val="1+#ppt_h/2"/>
-                                          </p:val>
-                                        </p:tav>
-                                        <p:tav tm="100000">
-                                          <p:val>
-                                            <p:strVal val="#ppt_y"/>
-                                          </p:val>
-                                        </p:tav>
-                                      </p:tavLst>
-                                    </p:anim>
-                                  </p:childTnLst>
-                                </p:cTn>
-                              </p:par>
-                              <p:par>
-                                <p:cTn id="15" presetID="2" presetClass="entr" presetSubtype="4" fill="hold" nodeType="withEffect">
-                                  <p:stCondLst>
-                                    <p:cond delay="0"/>
-                                  </p:stCondLst>
-                                  <p:childTnLst>
-                                    <p:set>
-                                      <p:cBhvr>
-                                        <p:cTn id="16" dur="1" fill="hold">
-                                          <p:stCondLst>
-                                            <p:cond delay="0"/>
-                                          </p:stCondLst>
-                                        </p:cTn>
-                                        <p:tgtEl>
-                                          <p:spTgt spid="654339">
-                                            <p:txEl>
-                                              <p:pRg st="4" end="4"/>
-                                            </p:txEl>
-                                          </p:spTgt>
-                                        </p:tgtEl>
-                                        <p:attrNameLst>
-                                          <p:attrName>style.visibility</p:attrName>
-                                        </p:attrNameLst>
-                                      </p:cBhvr>
-                                      <p:to>
-                                        <p:strVal val="visible"/>
-                                      </p:to>
-                                    </p:set>
-                                    <p:anim calcmode="lin" valueType="num">
-                                      <p:cBhvr additive="base">
-                                        <p:cTn id="17" dur="500" fill="hold"/>
-                                        <p:tgtEl>
-                                          <p:spTgt spid="654339">
-                                            <p:txEl>
-                                              <p:pRg st="4" end="4"/>
-                                            </p:txEl>
-                                          </p:spTgt>
-                                        </p:tgtEl>
-                                        <p:attrNameLst>
-                                          <p:attrName>ppt_x</p:attrName>
-                                        </p:attrNameLst>
-                                      </p:cBhvr>
-                                      <p:tavLst>
-                                        <p:tav tm="0">
-                                          <p:val>
-                                            <p:strVal val="#ppt_x"/>
-                                          </p:val>
-                                        </p:tav>
-                                        <p:tav tm="100000">
-                                          <p:val>
-                                            <p:strVal val="#ppt_x"/>
-                                          </p:val>
-                                        </p:tav>
-                                      </p:tavLst>
-                                    </p:anim>
-                                    <p:anim calcmode="lin" valueType="num">
-                                      <p:cBhvr additive="base">
-                                        <p:cTn id="18" dur="500" fill="hold"/>
-                                        <p:tgtEl>
-                                          <p:spTgt spid="654339">
-                                            <p:txEl>
-                                              <p:pRg st="4" end="4"/>
+                                              <p:pRg st="2" end="2"/>
                                             </p:txEl>
                                           </p:spTgt>
                                         </p:tgtEl>
@@ -10245,19 +10202,104 @@
                     </p:cTn>
                   </p:par>
                   <p:par>
-                    <p:cTn id="19" fill="hold">
+                    <p:cTn id="15" fill="hold">
                       <p:stCondLst>
                         <p:cond delay="indefinite"/>
                       </p:stCondLst>
                       <p:childTnLst>
                         <p:par>
-                          <p:cTn id="20" fill="hold">
+                          <p:cTn id="16" fill="hold">
                             <p:stCondLst>
                               <p:cond delay="0"/>
                             </p:stCondLst>
                             <p:childTnLst>
                               <p:par>
-                                <p:cTn id="21" presetID="2" presetClass="entr" presetSubtype="4" fill="hold" nodeType="clickEffect">
+                                <p:cTn id="17" presetID="2" presetClass="entr" presetSubtype="4" fill="hold" nodeType="clickEffect">
+                                  <p:stCondLst>
+                                    <p:cond delay="0"/>
+                                  </p:stCondLst>
+                                  <p:childTnLst>
+                                    <p:set>
+                                      <p:cBhvr>
+                                        <p:cTn id="18" dur="1" fill="hold">
+                                          <p:stCondLst>
+                                            <p:cond delay="0"/>
+                                          </p:stCondLst>
+                                        </p:cTn>
+                                        <p:tgtEl>
+                                          <p:spTgt spid="654339">
+                                            <p:txEl>
+                                              <p:pRg st="4" end="4"/>
+                                            </p:txEl>
+                                          </p:spTgt>
+                                        </p:tgtEl>
+                                        <p:attrNameLst>
+                                          <p:attrName>style.visibility</p:attrName>
+                                        </p:attrNameLst>
+                                      </p:cBhvr>
+                                      <p:to>
+                                        <p:strVal val="visible"/>
+                                      </p:to>
+                                    </p:set>
+                                    <p:anim calcmode="lin" valueType="num">
+                                      <p:cBhvr additive="base">
+                                        <p:cTn id="19" dur="500" fill="hold"/>
+                                        <p:tgtEl>
+                                          <p:spTgt spid="654339">
+                                            <p:txEl>
+                                              <p:pRg st="4" end="4"/>
+                                            </p:txEl>
+                                          </p:spTgt>
+                                        </p:tgtEl>
+                                        <p:attrNameLst>
+                                          <p:attrName>ppt_x</p:attrName>
+                                        </p:attrNameLst>
+                                      </p:cBhvr>
+                                      <p:tavLst>
+                                        <p:tav tm="0">
+                                          <p:val>
+                                            <p:strVal val="#ppt_x"/>
+                                          </p:val>
+                                        </p:tav>
+                                        <p:tav tm="100000">
+                                          <p:val>
+                                            <p:strVal val="#ppt_x"/>
+                                          </p:val>
+                                        </p:tav>
+                                      </p:tavLst>
+                                    </p:anim>
+                                    <p:anim calcmode="lin" valueType="num">
+                                      <p:cBhvr additive="base">
+                                        <p:cTn id="20" dur="500" fill="hold"/>
+                                        <p:tgtEl>
+                                          <p:spTgt spid="654339">
+                                            <p:txEl>
+                                              <p:pRg st="4" end="4"/>
+                                            </p:txEl>
+                                          </p:spTgt>
+                                        </p:tgtEl>
+                                        <p:attrNameLst>
+                                          <p:attrName>ppt_y</p:attrName>
+                                        </p:attrNameLst>
+                                      </p:cBhvr>
+                                      <p:tavLst>
+                                        <p:tav tm="0">
+                                          <p:val>
+                                            <p:strVal val="1+#ppt_h/2"/>
+                                          </p:val>
+                                        </p:tav>
+                                        <p:tav tm="100000">
+                                          <p:val>
+                                            <p:strVal val="#ppt_y"/>
+                                          </p:val>
+                                        </p:tav>
+                                      </p:tavLst>
+                                    </p:anim>
+                                  </p:childTnLst>
+                                </p:cTn>
+                              </p:par>
+                              <p:par>
+                                <p:cTn id="21" presetID="2" presetClass="entr" presetSubtype="4" fill="hold" nodeType="withEffect">
                                   <p:stCondLst>
                                     <p:cond delay="0"/>
                                   </p:stCondLst>
@@ -10272,7 +10314,7 @@
                                         <p:tgtEl>
                                           <p:spTgt spid="654339">
                                             <p:txEl>
-                                              <p:pRg st="7" end="7"/>
+                                              <p:pRg st="5" end="5"/>
                                             </p:txEl>
                                           </p:spTgt>
                                         </p:tgtEl>
@@ -10290,7 +10332,7 @@
                                         <p:tgtEl>
                                           <p:spTgt spid="654339">
                                             <p:txEl>
-                                              <p:pRg st="7" end="7"/>
+                                              <p:pRg st="5" end="5"/>
                                             </p:txEl>
                                           </p:spTgt>
                                         </p:tgtEl>
@@ -10317,7 +10359,110 @@
                                         <p:tgtEl>
                                           <p:spTgt spid="654339">
                                             <p:txEl>
-                                              <p:pRg st="7" end="7"/>
+                                              <p:pRg st="5" end="5"/>
+                                            </p:txEl>
+                                          </p:spTgt>
+                                        </p:tgtEl>
+                                        <p:attrNameLst>
+                                          <p:attrName>ppt_y</p:attrName>
+                                        </p:attrNameLst>
+                                      </p:cBhvr>
+                                      <p:tavLst>
+                                        <p:tav tm="0">
+                                          <p:val>
+                                            <p:strVal val="1+#ppt_h/2"/>
+                                          </p:val>
+                                        </p:tav>
+                                        <p:tav tm="100000">
+                                          <p:val>
+                                            <p:strVal val="#ppt_y"/>
+                                          </p:val>
+                                        </p:tav>
+                                      </p:tavLst>
+                                    </p:anim>
+                                  </p:childTnLst>
+                                </p:cTn>
+                              </p:par>
+                            </p:childTnLst>
+                          </p:cTn>
+                        </p:par>
+                      </p:childTnLst>
+                    </p:cTn>
+                  </p:par>
+                  <p:par>
+                    <p:cTn id="25" fill="hold">
+                      <p:stCondLst>
+                        <p:cond delay="indefinite"/>
+                      </p:stCondLst>
+                      <p:childTnLst>
+                        <p:par>
+                          <p:cTn id="26" fill="hold">
+                            <p:stCondLst>
+                              <p:cond delay="0"/>
+                            </p:stCondLst>
+                            <p:childTnLst>
+                              <p:par>
+                                <p:cTn id="27" presetID="2" presetClass="entr" presetSubtype="4" fill="hold" nodeType="clickEffect">
+                                  <p:stCondLst>
+                                    <p:cond delay="0"/>
+                                  </p:stCondLst>
+                                  <p:childTnLst>
+                                    <p:set>
+                                      <p:cBhvr>
+                                        <p:cTn id="28" dur="1" fill="hold">
+                                          <p:stCondLst>
+                                            <p:cond delay="0"/>
+                                          </p:stCondLst>
+                                        </p:cTn>
+                                        <p:tgtEl>
+                                          <p:spTgt spid="654339">
+                                            <p:txEl>
+                                              <p:pRg st="8" end="8"/>
+                                            </p:txEl>
+                                          </p:spTgt>
+                                        </p:tgtEl>
+                                        <p:attrNameLst>
+                                          <p:attrName>style.visibility</p:attrName>
+                                        </p:attrNameLst>
+                                      </p:cBhvr>
+                                      <p:to>
+                                        <p:strVal val="visible"/>
+                                      </p:to>
+                                    </p:set>
+                                    <p:anim calcmode="lin" valueType="num">
+                                      <p:cBhvr additive="base">
+                                        <p:cTn id="29" dur="500" fill="hold"/>
+                                        <p:tgtEl>
+                                          <p:spTgt spid="654339">
+                                            <p:txEl>
+                                              <p:pRg st="8" end="8"/>
+                                            </p:txEl>
+                                          </p:spTgt>
+                                        </p:tgtEl>
+                                        <p:attrNameLst>
+                                          <p:attrName>ppt_x</p:attrName>
+                                        </p:attrNameLst>
+                                      </p:cBhvr>
+                                      <p:tavLst>
+                                        <p:tav tm="0">
+                                          <p:val>
+                                            <p:strVal val="#ppt_x"/>
+                                          </p:val>
+                                        </p:tav>
+                                        <p:tav tm="100000">
+                                          <p:val>
+                                            <p:strVal val="#ppt_x"/>
+                                          </p:val>
+                                        </p:tav>
+                                      </p:tavLst>
+                                    </p:anim>
+                                    <p:anim calcmode="lin" valueType="num">
+                                      <p:cBhvr additive="base">
+                                        <p:cTn id="30" dur="500" fill="hold"/>
+                                        <p:tgtEl>
+                                          <p:spTgt spid="654339">
+                                            <p:txEl>
+                                              <p:pRg st="8" end="8"/>
                                             </p:txEl>
                                           </p:spTgt>
                                         </p:tgtEl>
@@ -10429,14 +10574,14 @@
           <a:noFill/>
           <a:extLst>
             <a:ext uri="{909E8E84-426E-40dd-AFC4-6F175D3DCCD1}">
-              <a14:hiddenFill xmlns:a14="http://schemas.microsoft.com/office/drawing/2010/main" xmlns="">
+              <a14:hiddenFill xmlns="" xmlns:a14="http://schemas.microsoft.com/office/drawing/2010/main">
                 <a:solidFill>
                   <a:srgbClr val="FFFFFF"/>
                 </a:solidFill>
               </a14:hiddenFill>
             </a:ext>
             <a:ext uri="{91240B29-F687-4f45-9708-019B960494DF}">
-              <a14:hiddenLine xmlns:a14="http://schemas.microsoft.com/office/drawing/2010/main" xmlns="" w="9525">
+              <a14:hiddenLine xmlns="" xmlns:a14="http://schemas.microsoft.com/office/drawing/2010/main" w="9525">
                 <a:solidFill>
                   <a:srgbClr val="000000"/>
                 </a:solidFill>
@@ -11076,14 +11221,14 @@
           <a:noFill/>
           <a:extLst>
             <a:ext uri="{909E8E84-426E-40dd-AFC4-6F175D3DCCD1}">
-              <a14:hiddenFill xmlns:a14="http://schemas.microsoft.com/office/drawing/2010/main" xmlns="">
+              <a14:hiddenFill xmlns="" xmlns:a14="http://schemas.microsoft.com/office/drawing/2010/main">
                 <a:solidFill>
                   <a:srgbClr val="FFFFFF"/>
                 </a:solidFill>
               </a14:hiddenFill>
             </a:ext>
             <a:ext uri="{91240B29-F687-4f45-9708-019B960494DF}">
-              <a14:hiddenLine xmlns:a14="http://schemas.microsoft.com/office/drawing/2010/main" xmlns="" w="9525">
+              <a14:hiddenLine xmlns="" xmlns:a14="http://schemas.microsoft.com/office/drawing/2010/main" w="9525">
                 <a:solidFill>
                   <a:srgbClr val="000000"/>
                 </a:solidFill>
@@ -11498,7 +11643,7 @@
           </a:ln>
           <a:extLst>
             <a:ext uri="{91240B29-F687-4f45-9708-019B960494DF}">
-              <a14:hiddenLine xmlns="" xmlns:a14="http://schemas.microsoft.com/office/drawing/2010/main" w="12700" cap="sq">
+              <a14:hiddenLine xmlns:a14="http://schemas.microsoft.com/office/drawing/2010/main" xmlns="" w="12700" cap="sq">
                 <a:solidFill>
                   <a:srgbClr val="000000"/>
                 </a:solidFill>
@@ -11659,7 +11804,7 @@
           </a:ln>
           <a:extLst>
             <a:ext uri="{91240B29-F687-4f45-9708-019B960494DF}">
-              <a14:hiddenLine xmlns="" xmlns:a14="http://schemas.microsoft.com/office/drawing/2010/main" w="12700" cap="sq">
+              <a14:hiddenLine xmlns:a14="http://schemas.microsoft.com/office/drawing/2010/main" xmlns="" w="12700" cap="sq">
                 <a:solidFill>
                   <a:srgbClr val="000000"/>
                 </a:solidFill>
@@ -12251,14 +12396,14 @@
           <a:noFill/>
           <a:extLst>
             <a:ext uri="{909E8E84-426E-40dd-AFC4-6F175D3DCCD1}">
-              <a14:hiddenFill xmlns:a14="http://schemas.microsoft.com/office/drawing/2010/main" xmlns="">
+              <a14:hiddenFill xmlns="" xmlns:a14="http://schemas.microsoft.com/office/drawing/2010/main">
                 <a:solidFill>
                   <a:srgbClr val="FFFFFF"/>
                 </a:solidFill>
               </a14:hiddenFill>
             </a:ext>
             <a:ext uri="{91240B29-F687-4f45-9708-019B960494DF}">
-              <a14:hiddenLine xmlns:a14="http://schemas.microsoft.com/office/drawing/2010/main" xmlns="" w="9525">
+              <a14:hiddenLine xmlns="" xmlns:a14="http://schemas.microsoft.com/office/drawing/2010/main" w="9525">
                 <a:solidFill>
                   <a:srgbClr val="000000"/>
                 </a:solidFill>
@@ -12670,7 +12815,7 @@
           </a:ln>
           <a:extLst>
             <a:ext uri="{91240B29-F687-4f45-9708-019B960494DF}">
-              <a14:hiddenLine xmlns="" xmlns:a14="http://schemas.microsoft.com/office/drawing/2010/main" w="12700" cap="sq">
+              <a14:hiddenLine xmlns:a14="http://schemas.microsoft.com/office/drawing/2010/main" xmlns="" w="12700" cap="sq">
                 <a:solidFill>
                   <a:srgbClr val="000000"/>
                 </a:solidFill>
@@ -12831,7 +12976,7 @@
           </a:ln>
           <a:extLst>
             <a:ext uri="{91240B29-F687-4f45-9708-019B960494DF}">
-              <a14:hiddenLine xmlns="" xmlns:a14="http://schemas.microsoft.com/office/drawing/2010/main" w="12700" cap="sq">
+              <a14:hiddenLine xmlns:a14="http://schemas.microsoft.com/office/drawing/2010/main" xmlns="" w="12700" cap="sq">
                 <a:solidFill>
                   <a:srgbClr val="000000"/>
                 </a:solidFill>
@@ -12997,14 +13142,14 @@
           <a:effectLst/>
           <a:extLst>
             <a:ext uri="{909E8E84-426E-40dd-AFC4-6F175D3DCCD1}">
-              <a14:hiddenFill xmlns="" xmlns:a14="http://schemas.microsoft.com/office/drawing/2010/main">
+              <a14:hiddenFill xmlns:a14="http://schemas.microsoft.com/office/drawing/2010/main" xmlns="">
                 <a:solidFill>
                   <a:schemeClr val="accent1"/>
                 </a:solidFill>
               </a14:hiddenFill>
             </a:ext>
             <a:ext uri="{AF507438-7753-43e0-B8FC-AC1667EBCBE1}">
-              <a14:hiddenEffects xmlns="" xmlns:a14="http://schemas.microsoft.com/office/drawing/2010/main">
+              <a14:hiddenEffects xmlns:a14="http://schemas.microsoft.com/office/drawing/2010/main" xmlns="">
                 <a:effectLst>
                   <a:outerShdw blurRad="63500" dist="35921" dir="2700000" algn="ctr" rotWithShape="0">
                     <a:schemeClr val="bg2"/>
@@ -13045,7 +13190,7 @@
           </a:ln>
           <a:extLst>
             <a:ext uri="{91240B29-F687-4f45-9708-019B960494DF}">
-              <a14:hiddenLine xmlns="" xmlns:a14="http://schemas.microsoft.com/office/drawing/2010/main" w="12700" cap="sq">
+              <a14:hiddenLine xmlns:a14="http://schemas.microsoft.com/office/drawing/2010/main" xmlns="" w="12700" cap="sq">
                 <a:solidFill>
                   <a:srgbClr val="000000"/>
                 </a:solidFill>
@@ -13206,7 +13351,7 @@
           </a:ln>
           <a:extLst>
             <a:ext uri="{91240B29-F687-4f45-9708-019B960494DF}">
-              <a14:hiddenLine xmlns="" xmlns:a14="http://schemas.microsoft.com/office/drawing/2010/main" w="12700" cap="sq">
+              <a14:hiddenLine xmlns:a14="http://schemas.microsoft.com/office/drawing/2010/main" xmlns="" w="12700" cap="sq">
                 <a:solidFill>
                   <a:srgbClr val="000000"/>
                 </a:solidFill>
@@ -13367,7 +13512,7 @@
           </a:ln>
           <a:extLst>
             <a:ext uri="{91240B29-F687-4f45-9708-019B960494DF}">
-              <a14:hiddenLine xmlns="" xmlns:a14="http://schemas.microsoft.com/office/drawing/2010/main" w="12700" cap="sq">
+              <a14:hiddenLine xmlns:a14="http://schemas.microsoft.com/office/drawing/2010/main" xmlns="" w="12700" cap="sq">
                 <a:solidFill>
                   <a:srgbClr val="000000"/>
                 </a:solidFill>
@@ -13498,6 +13643,112 @@
           </a:p>
         </p:txBody>
       </p:sp>
+      <p:cxnSp>
+        <p:nvCxnSpPr>
+          <p:cNvPr id="2" name="Straight Arrow Connector 1">
+            <a:extLst>
+              <a:ext uri="{FF2B5EF4-FFF2-40B4-BE49-F238E27FC236}">
+                <a16:creationId xmlns:a16="http://schemas.microsoft.com/office/drawing/2014/main" id="{FE167FC0-E325-CCBE-61C2-5546206A3496}"/>
+              </a:ext>
+            </a:extLst>
+          </p:cNvPr>
+          <p:cNvCxnSpPr>
+            <a:cxnSpLocks/>
+          </p:cNvCxnSpPr>
+          <p:nvPr/>
+        </p:nvCxnSpPr>
+        <p:spPr bwMode="auto">
+          <a:xfrm>
+            <a:off x="4866336" y="3519294"/>
+            <a:ext cx="0" cy="554279"/>
+          </a:xfrm>
+          <a:prstGeom prst="straightConnector1">
+            <a:avLst/>
+          </a:prstGeom>
+          <a:noFill/>
+          <a:ln w="69850" cap="sq" cmpd="sng" algn="ctr">
+            <a:solidFill>
+              <a:schemeClr val="tx1"/>
+            </a:solidFill>
+            <a:prstDash val="solid"/>
+            <a:round/>
+            <a:headEnd type="none" w="med" len="med"/>
+            <a:tailEnd type="triangle"/>
+          </a:ln>
+          <a:effectLst/>
+          <a:extLst>
+            <a:ext uri="{909E8E84-426E-40dd-AFC4-6F175D3DCCD1}">
+              <a14:hiddenFill xmlns:a14="http://schemas.microsoft.com/office/drawing/2010/main" xmlns="">
+                <a:solidFill>
+                  <a:schemeClr val="accent1"/>
+                </a:solidFill>
+              </a14:hiddenFill>
+            </a:ext>
+            <a:ext uri="{AF507438-7753-43e0-B8FC-AC1667EBCBE1}">
+              <a14:hiddenEffects xmlns:a14="http://schemas.microsoft.com/office/drawing/2010/main" xmlns="">
+                <a:effectLst>
+                  <a:outerShdw blurRad="63500" dist="35921" dir="2700000" algn="ctr" rotWithShape="0">
+                    <a:schemeClr val="bg2"/>
+                  </a:outerShdw>
+                </a:effectLst>
+              </a14:hiddenEffects>
+            </a:ext>
+          </a:extLst>
+        </p:spPr>
+      </p:cxnSp>
+      <p:cxnSp>
+        <p:nvCxnSpPr>
+          <p:cNvPr id="9" name="Straight Arrow Connector 8">
+            <a:extLst>
+              <a:ext uri="{FF2B5EF4-FFF2-40B4-BE49-F238E27FC236}">
+                <a16:creationId xmlns:a16="http://schemas.microsoft.com/office/drawing/2014/main" id="{2B9617E1-2826-98B4-6911-DEB3CF044B68}"/>
+              </a:ext>
+            </a:extLst>
+          </p:cNvPr>
+          <p:cNvCxnSpPr>
+            <a:cxnSpLocks/>
+          </p:cNvCxnSpPr>
+          <p:nvPr/>
+        </p:nvCxnSpPr>
+        <p:spPr bwMode="auto">
+          <a:xfrm>
+            <a:off x="6558169" y="4596793"/>
+            <a:ext cx="0" cy="554279"/>
+          </a:xfrm>
+          <a:prstGeom prst="straightConnector1">
+            <a:avLst/>
+          </a:prstGeom>
+          <a:noFill/>
+          <a:ln w="69850" cap="sq" cmpd="sng" algn="ctr">
+            <a:solidFill>
+              <a:schemeClr val="tx1"/>
+            </a:solidFill>
+            <a:prstDash val="solid"/>
+            <a:round/>
+            <a:headEnd type="none" w="med" len="med"/>
+            <a:tailEnd type="triangle"/>
+          </a:ln>
+          <a:effectLst/>
+          <a:extLst>
+            <a:ext uri="{909E8E84-426E-40dd-AFC4-6F175D3DCCD1}">
+              <a14:hiddenFill xmlns:a14="http://schemas.microsoft.com/office/drawing/2010/main" xmlns="">
+                <a:solidFill>
+                  <a:schemeClr val="accent1"/>
+                </a:solidFill>
+              </a14:hiddenFill>
+            </a:ext>
+            <a:ext uri="{AF507438-7753-43e0-B8FC-AC1667EBCBE1}">
+              <a14:hiddenEffects xmlns:a14="http://schemas.microsoft.com/office/drawing/2010/main" xmlns="">
+                <a:effectLst>
+                  <a:outerShdw blurRad="63500" dist="35921" dir="2700000" algn="ctr" rotWithShape="0">
+                    <a:schemeClr val="bg2"/>
+                  </a:outerShdw>
+                </a:effectLst>
+              </a14:hiddenEffects>
+            </a:ext>
+          </a:extLst>
+        </p:spPr>
+      </p:cxnSp>
     </p:spTree>
     <p:extLst>
       <p:ext uri="{BB962C8B-B14F-4D97-AF65-F5344CB8AC3E}">
@@ -13996,7 +14247,7 @@
                             </p:stCondLst>
                             <p:childTnLst>
                               <p:par>
-                                <p:cTn id="35" presetID="2" presetClass="entr" presetSubtype="4" fill="hold" grpId="0" nodeType="clickEffect">
+                                <p:cTn id="35" presetID="2" presetClass="entr" presetSubtype="4" fill="hold" nodeType="clickEffect">
                                   <p:stCondLst>
                                     <p:cond delay="0"/>
                                   </p:stCondLst>
@@ -14009,7 +14260,7 @@
                                           </p:stCondLst>
                                         </p:cTn>
                                         <p:tgtEl>
-                                          <p:spTgt spid="11"/>
+                                          <p:spTgt spid="2"/>
                                         </p:tgtEl>
                                         <p:attrNameLst>
                                           <p:attrName>style.visibility</p:attrName>
@@ -14023,7 +14274,7 @@
                                       <p:cBhvr additive="base">
                                         <p:cTn id="37" dur="500" fill="hold"/>
                                         <p:tgtEl>
-                                          <p:spTgt spid="11"/>
+                                          <p:spTgt spid="2"/>
                                         </p:tgtEl>
                                         <p:attrNameLst>
                                           <p:attrName>ppt_x</p:attrName>
@@ -14046,7 +14297,7 @@
                                       <p:cBhvr additive="base">
                                         <p:cTn id="38" dur="500" fill="hold"/>
                                         <p:tgtEl>
-                                          <p:spTgt spid="11"/>
+                                          <p:spTgt spid="2"/>
                                         </p:tgtEl>
                                         <p:attrNameLst>
                                           <p:attrName>ppt_y</p:attrName>
@@ -14087,7 +14338,7 @@
                             </p:stCondLst>
                             <p:childTnLst>
                               <p:par>
-                                <p:cTn id="41" presetID="2" presetClass="entr" presetSubtype="4" fill="hold" nodeType="clickEffect">
+                                <p:cTn id="41" presetID="2" presetClass="entr" presetSubtype="4" fill="hold" grpId="0" nodeType="clickEffect">
                                   <p:stCondLst>
                                     <p:cond delay="0"/>
                                   </p:stCondLst>
@@ -14100,11 +14351,7 @@
                                           </p:stCondLst>
                                         </p:cTn>
                                         <p:tgtEl>
-                                          <p:spTgt spid="5">
-                                            <p:txEl>
-                                              <p:pRg st="3" end="3"/>
-                                            </p:txEl>
-                                          </p:spTgt>
+                                          <p:spTgt spid="11"/>
                                         </p:tgtEl>
                                         <p:attrNameLst>
                                           <p:attrName>style.visibility</p:attrName>
@@ -14118,11 +14365,7 @@
                                       <p:cBhvr additive="base">
                                         <p:cTn id="43" dur="500" fill="hold"/>
                                         <p:tgtEl>
-                                          <p:spTgt spid="5">
-                                            <p:txEl>
-                                              <p:pRg st="3" end="3"/>
-                                            </p:txEl>
-                                          </p:spTgt>
+                                          <p:spTgt spid="11"/>
                                         </p:tgtEl>
                                         <p:attrNameLst>
                                           <p:attrName>ppt_x</p:attrName>
@@ -14145,11 +14388,7 @@
                                       <p:cBhvr additive="base">
                                         <p:cTn id="44" dur="500" fill="hold"/>
                                         <p:tgtEl>
-                                          <p:spTgt spid="5">
-                                            <p:txEl>
-                                              <p:pRg st="3" end="3"/>
-                                            </p:txEl>
-                                          </p:spTgt>
+                                          <p:spTgt spid="11"/>
                                         </p:tgtEl>
                                         <p:attrNameLst>
                                           <p:attrName>ppt_y</p:attrName>
@@ -14190,7 +14429,7 @@
                             </p:stCondLst>
                             <p:childTnLst>
                               <p:par>
-                                <p:cTn id="47" presetID="2" presetClass="entr" presetSubtype="4" fill="hold" grpId="0" nodeType="clickEffect">
+                                <p:cTn id="47" presetID="2" presetClass="entr" presetSubtype="4" fill="hold" nodeType="clickEffect">
                                   <p:stCondLst>
                                     <p:cond delay="0"/>
                                   </p:stCondLst>
@@ -14203,7 +14442,11 @@
                                           </p:stCondLst>
                                         </p:cTn>
                                         <p:tgtEl>
-                                          <p:spTgt spid="12"/>
+                                          <p:spTgt spid="5">
+                                            <p:txEl>
+                                              <p:pRg st="3" end="3"/>
+                                            </p:txEl>
+                                          </p:spTgt>
                                         </p:tgtEl>
                                         <p:attrNameLst>
                                           <p:attrName>style.visibility</p:attrName>
@@ -14217,7 +14460,11 @@
                                       <p:cBhvr additive="base">
                                         <p:cTn id="49" dur="500" fill="hold"/>
                                         <p:tgtEl>
-                                          <p:spTgt spid="12"/>
+                                          <p:spTgt spid="5">
+                                            <p:txEl>
+                                              <p:pRg st="3" end="3"/>
+                                            </p:txEl>
+                                          </p:spTgt>
                                         </p:tgtEl>
                                         <p:attrNameLst>
                                           <p:attrName>ppt_x</p:attrName>
@@ -14240,7 +14487,11 @@
                                       <p:cBhvr additive="base">
                                         <p:cTn id="50" dur="500" fill="hold"/>
                                         <p:tgtEl>
-                                          <p:spTgt spid="12"/>
+                                          <p:spTgt spid="5">
+                                            <p:txEl>
+                                              <p:pRg st="3" end="3"/>
+                                            </p:txEl>
+                                          </p:spTgt>
                                         </p:tgtEl>
                                         <p:attrNameLst>
                                           <p:attrName>ppt_y</p:attrName>
@@ -14294,6 +14545,188 @@
                                           </p:stCondLst>
                                         </p:cTn>
                                         <p:tgtEl>
+                                          <p:spTgt spid="9"/>
+                                        </p:tgtEl>
+                                        <p:attrNameLst>
+                                          <p:attrName>style.visibility</p:attrName>
+                                        </p:attrNameLst>
+                                      </p:cBhvr>
+                                      <p:to>
+                                        <p:strVal val="visible"/>
+                                      </p:to>
+                                    </p:set>
+                                    <p:anim calcmode="lin" valueType="num">
+                                      <p:cBhvr additive="base">
+                                        <p:cTn id="55" dur="500" fill="hold"/>
+                                        <p:tgtEl>
+                                          <p:spTgt spid="9"/>
+                                        </p:tgtEl>
+                                        <p:attrNameLst>
+                                          <p:attrName>ppt_x</p:attrName>
+                                        </p:attrNameLst>
+                                      </p:cBhvr>
+                                      <p:tavLst>
+                                        <p:tav tm="0">
+                                          <p:val>
+                                            <p:strVal val="#ppt_x"/>
+                                          </p:val>
+                                        </p:tav>
+                                        <p:tav tm="100000">
+                                          <p:val>
+                                            <p:strVal val="#ppt_x"/>
+                                          </p:val>
+                                        </p:tav>
+                                      </p:tavLst>
+                                    </p:anim>
+                                    <p:anim calcmode="lin" valueType="num">
+                                      <p:cBhvr additive="base">
+                                        <p:cTn id="56" dur="500" fill="hold"/>
+                                        <p:tgtEl>
+                                          <p:spTgt spid="9"/>
+                                        </p:tgtEl>
+                                        <p:attrNameLst>
+                                          <p:attrName>ppt_y</p:attrName>
+                                        </p:attrNameLst>
+                                      </p:cBhvr>
+                                      <p:tavLst>
+                                        <p:tav tm="0">
+                                          <p:val>
+                                            <p:strVal val="1+#ppt_h/2"/>
+                                          </p:val>
+                                        </p:tav>
+                                        <p:tav tm="100000">
+                                          <p:val>
+                                            <p:strVal val="#ppt_y"/>
+                                          </p:val>
+                                        </p:tav>
+                                      </p:tavLst>
+                                    </p:anim>
+                                  </p:childTnLst>
+                                </p:cTn>
+                              </p:par>
+                            </p:childTnLst>
+                          </p:cTn>
+                        </p:par>
+                      </p:childTnLst>
+                    </p:cTn>
+                  </p:par>
+                  <p:par>
+                    <p:cTn id="57" fill="hold">
+                      <p:stCondLst>
+                        <p:cond delay="indefinite"/>
+                      </p:stCondLst>
+                      <p:childTnLst>
+                        <p:par>
+                          <p:cTn id="58" fill="hold">
+                            <p:stCondLst>
+                              <p:cond delay="0"/>
+                            </p:stCondLst>
+                            <p:childTnLst>
+                              <p:par>
+                                <p:cTn id="59" presetID="2" presetClass="entr" presetSubtype="4" fill="hold" grpId="0" nodeType="clickEffect">
+                                  <p:stCondLst>
+                                    <p:cond delay="0"/>
+                                  </p:stCondLst>
+                                  <p:childTnLst>
+                                    <p:set>
+                                      <p:cBhvr>
+                                        <p:cTn id="60" dur="1" fill="hold">
+                                          <p:stCondLst>
+                                            <p:cond delay="0"/>
+                                          </p:stCondLst>
+                                        </p:cTn>
+                                        <p:tgtEl>
+                                          <p:spTgt spid="12"/>
+                                        </p:tgtEl>
+                                        <p:attrNameLst>
+                                          <p:attrName>style.visibility</p:attrName>
+                                        </p:attrNameLst>
+                                      </p:cBhvr>
+                                      <p:to>
+                                        <p:strVal val="visible"/>
+                                      </p:to>
+                                    </p:set>
+                                    <p:anim calcmode="lin" valueType="num">
+                                      <p:cBhvr additive="base">
+                                        <p:cTn id="61" dur="500" fill="hold"/>
+                                        <p:tgtEl>
+                                          <p:spTgt spid="12"/>
+                                        </p:tgtEl>
+                                        <p:attrNameLst>
+                                          <p:attrName>ppt_x</p:attrName>
+                                        </p:attrNameLst>
+                                      </p:cBhvr>
+                                      <p:tavLst>
+                                        <p:tav tm="0">
+                                          <p:val>
+                                            <p:strVal val="#ppt_x"/>
+                                          </p:val>
+                                        </p:tav>
+                                        <p:tav tm="100000">
+                                          <p:val>
+                                            <p:strVal val="#ppt_x"/>
+                                          </p:val>
+                                        </p:tav>
+                                      </p:tavLst>
+                                    </p:anim>
+                                    <p:anim calcmode="lin" valueType="num">
+                                      <p:cBhvr additive="base">
+                                        <p:cTn id="62" dur="500" fill="hold"/>
+                                        <p:tgtEl>
+                                          <p:spTgt spid="12"/>
+                                        </p:tgtEl>
+                                        <p:attrNameLst>
+                                          <p:attrName>ppt_y</p:attrName>
+                                        </p:attrNameLst>
+                                      </p:cBhvr>
+                                      <p:tavLst>
+                                        <p:tav tm="0">
+                                          <p:val>
+                                            <p:strVal val="1+#ppt_h/2"/>
+                                          </p:val>
+                                        </p:tav>
+                                        <p:tav tm="100000">
+                                          <p:val>
+                                            <p:strVal val="#ppt_y"/>
+                                          </p:val>
+                                        </p:tav>
+                                      </p:tavLst>
+                                    </p:anim>
+                                  </p:childTnLst>
+                                </p:cTn>
+                              </p:par>
+                            </p:childTnLst>
+                          </p:cTn>
+                        </p:par>
+                      </p:childTnLst>
+                    </p:cTn>
+                  </p:par>
+                  <p:par>
+                    <p:cTn id="63" fill="hold">
+                      <p:stCondLst>
+                        <p:cond delay="indefinite"/>
+                      </p:stCondLst>
+                      <p:childTnLst>
+                        <p:par>
+                          <p:cTn id="64" fill="hold">
+                            <p:stCondLst>
+                              <p:cond delay="0"/>
+                            </p:stCondLst>
+                            <p:childTnLst>
+                              <p:par>
+                                <p:cTn id="65" presetID="2" presetClass="entr" presetSubtype="4" fill="hold" nodeType="clickEffect">
+                                  <p:stCondLst>
+                                    <p:cond delay="0"/>
+                                  </p:stCondLst>
+                                  <p:childTnLst>
+                                    <p:set>
+                                      <p:cBhvr>
+                                        <p:cTn id="66" dur="1" fill="hold">
+                                          <p:stCondLst>
+                                            <p:cond delay="0"/>
+                                          </p:stCondLst>
+                                        </p:cTn>
+                                        <p:tgtEl>
                                           <p:spTgt spid="5">
                                             <p:txEl>
                                               <p:pRg st="6" end="6"/>
@@ -14310,7 +14743,7 @@
                                     </p:set>
                                     <p:anim calcmode="lin" valueType="num">
                                       <p:cBhvr additive="base">
-                                        <p:cTn id="55" dur="500" fill="hold"/>
+                                        <p:cTn id="67" dur="500" fill="hold"/>
                                         <p:tgtEl>
                                           <p:spTgt spid="5">
                                             <p:txEl>
@@ -14337,7 +14770,7 @@
                                     </p:anim>
                                     <p:anim calcmode="lin" valueType="num">
                                       <p:cBhvr additive="base">
-                                        <p:cTn id="56" dur="500" fill="hold"/>
+                                        <p:cTn id="68" dur="500" fill="hold"/>
                                         <p:tgtEl>
                                           <p:spTgt spid="5">
                                             <p:txEl>
@@ -14434,14 +14867,14 @@
           <a:noFill/>
           <a:extLst>
             <a:ext uri="{909E8E84-426E-40dd-AFC4-6F175D3DCCD1}">
-              <a14:hiddenFill xmlns:a14="http://schemas.microsoft.com/office/drawing/2010/main" xmlns="">
+              <a14:hiddenFill xmlns="" xmlns:a14="http://schemas.microsoft.com/office/drawing/2010/main">
                 <a:solidFill>
                   <a:srgbClr val="FFFFFF"/>
                 </a:solidFill>
               </a14:hiddenFill>
             </a:ext>
             <a:ext uri="{91240B29-F687-4f45-9708-019B960494DF}">
-              <a14:hiddenLine xmlns:a14="http://schemas.microsoft.com/office/drawing/2010/main" xmlns="" w="9525">
+              <a14:hiddenLine xmlns="" xmlns:a14="http://schemas.microsoft.com/office/drawing/2010/main" w="9525">
                 <a:solidFill>
                   <a:srgbClr val="000000"/>
                 </a:solidFill>
@@ -14869,7 +15302,7 @@
           </a:ln>
           <a:extLst>
             <a:ext uri="{91240B29-F687-4f45-9708-019B960494DF}">
-              <a14:hiddenLine xmlns="" xmlns:a14="http://schemas.microsoft.com/office/drawing/2010/main" w="12700" cap="sq">
+              <a14:hiddenLine xmlns:a14="http://schemas.microsoft.com/office/drawing/2010/main" xmlns="" w="12700" cap="sq">
                 <a:solidFill>
                   <a:srgbClr val="000000"/>
                 </a:solidFill>
@@ -15030,7 +15463,7 @@
           </a:ln>
           <a:extLst>
             <a:ext uri="{91240B29-F687-4f45-9708-019B960494DF}">
-              <a14:hiddenLine xmlns="" xmlns:a14="http://schemas.microsoft.com/office/drawing/2010/main" w="12700" cap="sq">
+              <a14:hiddenLine xmlns:a14="http://schemas.microsoft.com/office/drawing/2010/main" xmlns="" w="12700" cap="sq">
                 <a:solidFill>
                   <a:srgbClr val="000000"/>
                 </a:solidFill>
@@ -15191,7 +15624,7 @@
           </a:ln>
           <a:extLst>
             <a:ext uri="{91240B29-F687-4f45-9708-019B960494DF}">
-              <a14:hiddenLine xmlns="" xmlns:a14="http://schemas.microsoft.com/office/drawing/2010/main" w="12700" cap="sq">
+              <a14:hiddenLine xmlns:a14="http://schemas.microsoft.com/office/drawing/2010/main" xmlns="" w="12700" cap="sq">
                 <a:solidFill>
                   <a:srgbClr val="000000"/>
                 </a:solidFill>

--- a/topic08-higher-order-functions/unit-08a-lectures/talk-2/b-function-appl.pptx
+++ b/topic08-higher-order-functions/unit-08a-lectures/talk-2/b-function-appl.pptx
@@ -525,10 +525,10 @@
           </a:ln>
           <a:extLst>
             <a:ext uri="{FAA26D3D-D897-4be2-8F04-BA451C77F1D7}">
-              <ma14:placeholderFlag xmlns="" xmlns:ma14="http://schemas.microsoft.com/office/mac/drawingml/2011/main" val="1"/>
+              <ma14:placeholderFlag xmlns:ma14="http://schemas.microsoft.com/office/mac/drawingml/2011/main" xmlns="" val="1"/>
             </a:ext>
             <a:ext uri="{909E8E84-426E-40dd-AFC4-6F175D3DCCD1}">
-              <a14:hiddenFill xmlns="" xmlns:a14="http://schemas.microsoft.com/office/drawing/2010/main">
+              <a14:hiddenFill xmlns:a14="http://schemas.microsoft.com/office/drawing/2010/main" xmlns="">
                 <a:solidFill>
                   <a:srgbClr val="FFFFFF"/>
                 </a:solidFill>
@@ -1110,7 +1110,7 @@
             <a:fld id="{08B9EBBA-996F-894A-B54A-D6246ED52CEA}" type="datetimeFigureOut">
               <a:rPr lang="en-US" smtClean="0"/>
               <a:pPr/>
-              <a:t>3/7/26</a:t>
+              <a:t>3/9/26</a:t>
             </a:fld>
             <a:endParaRPr lang="en-US" dirty="0"/>
           </a:p>
@@ -1532,7 +1532,7 @@
             <a:fld id="{09B482E8-6E0E-1B4F-B1FD-C69DB9E858D9}" type="datetimeFigureOut">
               <a:rPr lang="en-US" smtClean="0"/>
               <a:pPr/>
-              <a:t>3/7/26</a:t>
+              <a:t>3/9/26</a:t>
             </a:fld>
             <a:endParaRPr lang="en-US" dirty="0"/>
           </a:p>
@@ -1876,7 +1876,7 @@
             <a:fld id="{09B482E8-6E0E-1B4F-B1FD-C69DB9E858D9}" type="datetimeFigureOut">
               <a:rPr lang="en-US" smtClean="0"/>
               <a:pPr/>
-              <a:t>3/7/26</a:t>
+              <a:t>3/9/26</a:t>
             </a:fld>
             <a:endParaRPr lang="en-US" dirty="0"/>
           </a:p>
@@ -2289,7 +2289,7 @@
             <a:fld id="{09B482E8-6E0E-1B4F-B1FD-C69DB9E858D9}" type="datetimeFigureOut">
               <a:rPr lang="en-US" smtClean="0"/>
               <a:pPr/>
-              <a:t>3/7/26</a:t>
+              <a:t>3/9/26</a:t>
             </a:fld>
             <a:endParaRPr lang="en-US" dirty="0"/>
           </a:p>
@@ -2865,7 +2865,7 @@
             <a:fld id="{09B482E8-6E0E-1B4F-B1FD-C69DB9E858D9}" type="datetimeFigureOut">
               <a:rPr lang="en-US" smtClean="0"/>
               <a:pPr/>
-              <a:t>3/7/26</a:t>
+              <a:t>3/9/26</a:t>
             </a:fld>
             <a:endParaRPr lang="en-US" dirty="0"/>
           </a:p>
@@ -3554,7 +3554,7 @@
             <a:fld id="{09B482E8-6E0E-1B4F-B1FD-C69DB9E858D9}" type="datetimeFigureOut">
               <a:rPr lang="en-US" smtClean="0"/>
               <a:pPr/>
-              <a:t>3/7/26</a:t>
+              <a:t>3/9/26</a:t>
             </a:fld>
             <a:endParaRPr lang="en-US" dirty="0"/>
           </a:p>
@@ -4475,7 +4475,7 @@
             <a:fld id="{09B482E8-6E0E-1B4F-B1FD-C69DB9E858D9}" type="datetimeFigureOut">
               <a:rPr lang="en-US" smtClean="0"/>
               <a:pPr/>
-              <a:t>3/7/26</a:t>
+              <a:t>3/9/26</a:t>
             </a:fld>
             <a:endParaRPr lang="en-US" dirty="0"/>
           </a:p>
@@ -4796,7 +4796,7 @@
             <a:fld id="{09B482E8-6E0E-1B4F-B1FD-C69DB9E858D9}" type="datetimeFigureOut">
               <a:rPr lang="en-US" smtClean="0"/>
               <a:pPr/>
-              <a:t>3/7/26</a:t>
+              <a:t>3/9/26</a:t>
             </a:fld>
             <a:endParaRPr lang="en-US" dirty="0"/>
           </a:p>
@@ -5067,7 +5067,7 @@
             <a:fld id="{09B482E8-6E0E-1B4F-B1FD-C69DB9E858D9}" type="datetimeFigureOut">
               <a:rPr lang="en-US" smtClean="0"/>
               <a:pPr/>
-              <a:t>3/7/26</a:t>
+              <a:t>3/9/26</a:t>
             </a:fld>
             <a:endParaRPr lang="en-US" dirty="0"/>
           </a:p>
@@ -5411,7 +5411,7 @@
             <a:fld id="{09B482E8-6E0E-1B4F-B1FD-C69DB9E858D9}" type="datetimeFigureOut">
               <a:rPr lang="en-US" smtClean="0"/>
               <a:pPr/>
-              <a:t>3/7/26</a:t>
+              <a:t>3/9/26</a:t>
             </a:fld>
             <a:endParaRPr lang="en-US" dirty="0"/>
           </a:p>
@@ -5807,7 +5807,7 @@
             <a:fld id="{8DFA1846-DA80-1C48-A609-854EA85C59AD}" type="datetimeFigureOut">
               <a:rPr lang="en-US" smtClean="0"/>
               <a:pPr/>
-              <a:t>3/7/26</a:t>
+              <a:t>3/9/26</a:t>
             </a:fld>
             <a:endParaRPr lang="en-US" dirty="0"/>
           </a:p>
@@ -6190,7 +6190,7 @@
             <a:fld id="{09B482E8-6E0E-1B4F-B1FD-C69DB9E858D9}" type="datetimeFigureOut">
               <a:rPr lang="en-US" smtClean="0"/>
               <a:pPr/>
-              <a:t>3/7/26</a:t>
+              <a:t>3/9/26</a:t>
             </a:fld>
             <a:endParaRPr lang="en-US" dirty="0"/>
           </a:p>
@@ -6703,7 +6703,7 @@
             <a:fld id="{09B482E8-6E0E-1B4F-B1FD-C69DB9E858D9}" type="datetimeFigureOut">
               <a:rPr lang="en-US" smtClean="0"/>
               <a:pPr/>
-              <a:t>3/7/26</a:t>
+              <a:t>3/9/26</a:t>
             </a:fld>
             <a:endParaRPr lang="en-US" dirty="0"/>
           </a:p>
@@ -6981,7 +6981,7 @@
             <a:fld id="{F13A34C8-038E-2045-AF43-DF7DBB8E0E9E}" type="datetimeFigureOut">
               <a:rPr lang="en-US" smtClean="0"/>
               <a:pPr/>
-              <a:t>3/7/26</a:t>
+              <a:t>3/9/26</a:t>
             </a:fld>
             <a:endParaRPr lang="en-US" dirty="0"/>
           </a:p>
@@ -7158,7 +7158,7 @@
             <a:fld id="{8818C68F-D26B-8F47-958C-23B49CF8A634}" type="datetimeFigureOut">
               <a:rPr lang="en-US" smtClean="0"/>
               <a:pPr/>
-              <a:t>3/7/26</a:t>
+              <a:t>3/9/26</a:t>
             </a:fld>
             <a:endParaRPr lang="en-US" dirty="0"/>
           </a:p>
@@ -7555,7 +7555,7 @@
             <a:fld id="{09B482E8-6E0E-1B4F-B1FD-C69DB9E858D9}" type="datetimeFigureOut">
               <a:rPr lang="en-US" smtClean="0"/>
               <a:pPr/>
-              <a:t>3/7/26</a:t>
+              <a:t>3/9/26</a:t>
             </a:fld>
             <a:endParaRPr lang="en-US" dirty="0"/>
           </a:p>
@@ -7971,7 +7971,7 @@
             <a:fld id="{09B482E8-6E0E-1B4F-B1FD-C69DB9E858D9}" type="datetimeFigureOut">
               <a:rPr lang="en-US" smtClean="0"/>
               <a:pPr/>
-              <a:t>3/7/26</a:t>
+              <a:t>3/9/26</a:t>
             </a:fld>
             <a:endParaRPr lang="en-US" dirty="0"/>
           </a:p>
@@ -8222,7 +8222,7 @@
             <a:fld id="{09B482E8-6E0E-1B4F-B1FD-C69DB9E858D9}" type="datetimeFigureOut">
               <a:rPr lang="en-US" smtClean="0"/>
               <a:pPr/>
-              <a:t>3/7/26</a:t>
+              <a:t>3/9/26</a:t>
             </a:fld>
             <a:endParaRPr lang="en-US" dirty="0"/>
           </a:p>
@@ -8659,14 +8659,14 @@
           <a:noFill/>
           <a:extLst>
             <a:ext uri="{909E8E84-426E-40dd-AFC4-6F175D3DCCD1}">
-              <a14:hiddenFill xmlns="" xmlns:a14="http://schemas.microsoft.com/office/drawing/2010/main">
+              <a14:hiddenFill xmlns:a14="http://schemas.microsoft.com/office/drawing/2010/main" xmlns="">
                 <a:solidFill>
                   <a:srgbClr val="FFFFFF"/>
                 </a:solidFill>
               </a14:hiddenFill>
             </a:ext>
             <a:ext uri="{91240B29-F687-4f45-9708-019B960494DF}">
-              <a14:hiddenLine xmlns="" xmlns:a14="http://schemas.microsoft.com/office/drawing/2010/main" w="9525">
+              <a14:hiddenLine xmlns:a14="http://schemas.microsoft.com/office/drawing/2010/main" xmlns="" w="9525">
                 <a:solidFill>
                   <a:srgbClr val="000000"/>
                 </a:solidFill>
@@ -8914,14 +8914,14 @@
           </a:ln>
           <a:extLst>
             <a:ext uri="{909E8E84-426E-40dd-AFC4-6F175D3DCCD1}">
-              <a14:hiddenFill xmlns="" xmlns:a14="http://schemas.microsoft.com/office/drawing/2010/main">
+              <a14:hiddenFill xmlns:a14="http://schemas.microsoft.com/office/drawing/2010/main" xmlns="">
                 <a:solidFill>
                   <a:srgbClr val="FFFFFF"/>
                 </a:solidFill>
               </a14:hiddenFill>
             </a:ext>
             <a:ext uri="{91240B29-F687-4f45-9708-019B960494DF}">
-              <a14:hiddenLine xmlns="" xmlns:a14="http://schemas.microsoft.com/office/drawing/2010/main" w="9525">
+              <a14:hiddenLine xmlns:a14="http://schemas.microsoft.com/office/drawing/2010/main" xmlns="" w="9525">
                 <a:solidFill>
                   <a:srgbClr val="000000"/>
                 </a:solidFill>
@@ -9003,14 +9003,14 @@
           <a:noFill/>
           <a:extLst>
             <a:ext uri="{909E8E84-426E-40dd-AFC4-6F175D3DCCD1}">
-              <a14:hiddenFill xmlns="" xmlns:a14="http://schemas.microsoft.com/office/drawing/2010/main">
+              <a14:hiddenFill xmlns:a14="http://schemas.microsoft.com/office/drawing/2010/main" xmlns="">
                 <a:solidFill>
                   <a:srgbClr val="FFFFFF"/>
                 </a:solidFill>
               </a14:hiddenFill>
             </a:ext>
             <a:ext uri="{91240B29-F687-4f45-9708-019B960494DF}">
-              <a14:hiddenLine xmlns="" xmlns:a14="http://schemas.microsoft.com/office/drawing/2010/main" w="9525">
+              <a14:hiddenLine xmlns:a14="http://schemas.microsoft.com/office/drawing/2010/main" xmlns="" w="9525">
                 <a:solidFill>
                   <a:srgbClr val="000000"/>
                 </a:solidFill>
@@ -9230,7 +9230,7 @@
           </a:ln>
           <a:extLst>
             <a:ext uri="{91240B29-F687-4f45-9708-019B960494DF}">
-              <a14:hiddenLine xmlns:a14="http://schemas.microsoft.com/office/drawing/2010/main" xmlns="" w="12700" cap="sq">
+              <a14:hiddenLine xmlns="" xmlns:a14="http://schemas.microsoft.com/office/drawing/2010/main" w="12700" cap="sq">
                 <a:solidFill>
                   <a:srgbClr val="000000"/>
                 </a:solidFill>
@@ -9745,14 +9745,14 @@
           <a:noFill/>
           <a:extLst>
             <a:ext uri="{909E8E84-426E-40dd-AFC4-6F175D3DCCD1}">
-              <a14:hiddenFill xmlns="" xmlns:a14="http://schemas.microsoft.com/office/drawing/2010/main">
+              <a14:hiddenFill xmlns:a14="http://schemas.microsoft.com/office/drawing/2010/main" xmlns="">
                 <a:solidFill>
                   <a:srgbClr val="FFFFFF"/>
                 </a:solidFill>
               </a14:hiddenFill>
             </a:ext>
             <a:ext uri="{91240B29-F687-4f45-9708-019B960494DF}">
-              <a14:hiddenLine xmlns="" xmlns:a14="http://schemas.microsoft.com/office/drawing/2010/main" w="9525">
+              <a14:hiddenLine xmlns:a14="http://schemas.microsoft.com/office/drawing/2010/main" xmlns="" w="9525">
                 <a:solidFill>
                   <a:srgbClr val="000000"/>
                 </a:solidFill>
@@ -10574,14 +10574,14 @@
           <a:noFill/>
           <a:extLst>
             <a:ext uri="{909E8E84-426E-40dd-AFC4-6F175D3DCCD1}">
-              <a14:hiddenFill xmlns="" xmlns:a14="http://schemas.microsoft.com/office/drawing/2010/main">
+              <a14:hiddenFill xmlns:a14="http://schemas.microsoft.com/office/drawing/2010/main" xmlns="">
                 <a:solidFill>
                   <a:srgbClr val="FFFFFF"/>
                 </a:solidFill>
               </a14:hiddenFill>
             </a:ext>
             <a:ext uri="{91240B29-F687-4f45-9708-019B960494DF}">
-              <a14:hiddenLine xmlns="" xmlns:a14="http://schemas.microsoft.com/office/drawing/2010/main" w="9525">
+              <a14:hiddenLine xmlns:a14="http://schemas.microsoft.com/office/drawing/2010/main" xmlns="" w="9525">
                 <a:solidFill>
                   <a:srgbClr val="000000"/>
                 </a:solidFill>
@@ -11221,14 +11221,14 @@
           <a:noFill/>
           <a:extLst>
             <a:ext uri="{909E8E84-426E-40dd-AFC4-6F175D3DCCD1}">
-              <a14:hiddenFill xmlns="" xmlns:a14="http://schemas.microsoft.com/office/drawing/2010/main">
+              <a14:hiddenFill xmlns:a14="http://schemas.microsoft.com/office/drawing/2010/main" xmlns="">
                 <a:solidFill>
                   <a:srgbClr val="FFFFFF"/>
                 </a:solidFill>
               </a14:hiddenFill>
             </a:ext>
             <a:ext uri="{91240B29-F687-4f45-9708-019B960494DF}">
-              <a14:hiddenLine xmlns="" xmlns:a14="http://schemas.microsoft.com/office/drawing/2010/main" w="9525">
+              <a14:hiddenLine xmlns:a14="http://schemas.microsoft.com/office/drawing/2010/main" xmlns="" w="9525">
                 <a:solidFill>
                   <a:srgbClr val="000000"/>
                 </a:solidFill>
@@ -11643,7 +11643,7 @@
           </a:ln>
           <a:extLst>
             <a:ext uri="{91240B29-F687-4f45-9708-019B960494DF}">
-              <a14:hiddenLine xmlns:a14="http://schemas.microsoft.com/office/drawing/2010/main" xmlns="" w="12700" cap="sq">
+              <a14:hiddenLine xmlns="" xmlns:a14="http://schemas.microsoft.com/office/drawing/2010/main" w="12700" cap="sq">
                 <a:solidFill>
                   <a:srgbClr val="000000"/>
                 </a:solidFill>
@@ -11804,7 +11804,7 @@
           </a:ln>
           <a:extLst>
             <a:ext uri="{91240B29-F687-4f45-9708-019B960494DF}">
-              <a14:hiddenLine xmlns:a14="http://schemas.microsoft.com/office/drawing/2010/main" xmlns="" w="12700" cap="sq">
+              <a14:hiddenLine xmlns="" xmlns:a14="http://schemas.microsoft.com/office/drawing/2010/main" w="12700" cap="sq">
                 <a:solidFill>
                   <a:srgbClr val="000000"/>
                 </a:solidFill>
@@ -12396,14 +12396,14 @@
           <a:noFill/>
           <a:extLst>
             <a:ext uri="{909E8E84-426E-40dd-AFC4-6F175D3DCCD1}">
-              <a14:hiddenFill xmlns="" xmlns:a14="http://schemas.microsoft.com/office/drawing/2010/main">
+              <a14:hiddenFill xmlns:a14="http://schemas.microsoft.com/office/drawing/2010/main" xmlns="">
                 <a:solidFill>
                   <a:srgbClr val="FFFFFF"/>
                 </a:solidFill>
               </a14:hiddenFill>
             </a:ext>
             <a:ext uri="{91240B29-F687-4f45-9708-019B960494DF}">
-              <a14:hiddenLine xmlns="" xmlns:a14="http://schemas.microsoft.com/office/drawing/2010/main" w="9525">
+              <a14:hiddenLine xmlns:a14="http://schemas.microsoft.com/office/drawing/2010/main" xmlns="" w="9525">
                 <a:solidFill>
                   <a:srgbClr val="000000"/>
                 </a:solidFill>
@@ -12815,7 +12815,7 @@
           </a:ln>
           <a:extLst>
             <a:ext uri="{91240B29-F687-4f45-9708-019B960494DF}">
-              <a14:hiddenLine xmlns:a14="http://schemas.microsoft.com/office/drawing/2010/main" xmlns="" w="12700" cap="sq">
+              <a14:hiddenLine xmlns="" xmlns:a14="http://schemas.microsoft.com/office/drawing/2010/main" w="12700" cap="sq">
                 <a:solidFill>
                   <a:srgbClr val="000000"/>
                 </a:solidFill>
@@ -12976,7 +12976,7 @@
           </a:ln>
           <a:extLst>
             <a:ext uri="{91240B29-F687-4f45-9708-019B960494DF}">
-              <a14:hiddenLine xmlns:a14="http://schemas.microsoft.com/office/drawing/2010/main" xmlns="" w="12700" cap="sq">
+              <a14:hiddenLine xmlns="" xmlns:a14="http://schemas.microsoft.com/office/drawing/2010/main" w="12700" cap="sq">
                 <a:solidFill>
                   <a:srgbClr val="000000"/>
                 </a:solidFill>
@@ -13142,14 +13142,14 @@
           <a:effectLst/>
           <a:extLst>
             <a:ext uri="{909E8E84-426E-40dd-AFC4-6F175D3DCCD1}">
-              <a14:hiddenFill xmlns:a14="http://schemas.microsoft.com/office/drawing/2010/main" xmlns="">
+              <a14:hiddenFill xmlns="" xmlns:a14="http://schemas.microsoft.com/office/drawing/2010/main">
                 <a:solidFill>
                   <a:schemeClr val="accent1"/>
                 </a:solidFill>
               </a14:hiddenFill>
             </a:ext>
             <a:ext uri="{AF507438-7753-43e0-B8FC-AC1667EBCBE1}">
-              <a14:hiddenEffects xmlns:a14="http://schemas.microsoft.com/office/drawing/2010/main" xmlns="">
+              <a14:hiddenEffects xmlns="" xmlns:a14="http://schemas.microsoft.com/office/drawing/2010/main">
                 <a:effectLst>
                   <a:outerShdw blurRad="63500" dist="35921" dir="2700000" algn="ctr" rotWithShape="0">
                     <a:schemeClr val="bg2"/>
@@ -13190,7 +13190,7 @@
           </a:ln>
           <a:extLst>
             <a:ext uri="{91240B29-F687-4f45-9708-019B960494DF}">
-              <a14:hiddenLine xmlns:a14="http://schemas.microsoft.com/office/drawing/2010/main" xmlns="" w="12700" cap="sq">
+              <a14:hiddenLine xmlns="" xmlns:a14="http://schemas.microsoft.com/office/drawing/2010/main" w="12700" cap="sq">
                 <a:solidFill>
                   <a:srgbClr val="000000"/>
                 </a:solidFill>
@@ -13351,7 +13351,7 @@
           </a:ln>
           <a:extLst>
             <a:ext uri="{91240B29-F687-4f45-9708-019B960494DF}">
-              <a14:hiddenLine xmlns:a14="http://schemas.microsoft.com/office/drawing/2010/main" xmlns="" w="12700" cap="sq">
+              <a14:hiddenLine xmlns="" xmlns:a14="http://schemas.microsoft.com/office/drawing/2010/main" w="12700" cap="sq">
                 <a:solidFill>
                   <a:srgbClr val="000000"/>
                 </a:solidFill>
@@ -13512,7 +13512,7 @@
           </a:ln>
           <a:extLst>
             <a:ext uri="{91240B29-F687-4f45-9708-019B960494DF}">
-              <a14:hiddenLine xmlns:a14="http://schemas.microsoft.com/office/drawing/2010/main" xmlns="" w="12700" cap="sq">
+              <a14:hiddenLine xmlns="" xmlns:a14="http://schemas.microsoft.com/office/drawing/2010/main" w="12700" cap="sq">
                 <a:solidFill>
                   <a:srgbClr val="000000"/>
                 </a:solidFill>
@@ -13678,14 +13678,14 @@
           <a:effectLst/>
           <a:extLst>
             <a:ext uri="{909E8E84-426E-40dd-AFC4-6F175D3DCCD1}">
-              <a14:hiddenFill xmlns:a14="http://schemas.microsoft.com/office/drawing/2010/main" xmlns="">
+              <a14:hiddenFill xmlns="" xmlns:a14="http://schemas.microsoft.com/office/drawing/2010/main">
                 <a:solidFill>
                   <a:schemeClr val="accent1"/>
                 </a:solidFill>
               </a14:hiddenFill>
             </a:ext>
             <a:ext uri="{AF507438-7753-43e0-B8FC-AC1667EBCBE1}">
-              <a14:hiddenEffects xmlns:a14="http://schemas.microsoft.com/office/drawing/2010/main" xmlns="">
+              <a14:hiddenEffects xmlns="" xmlns:a14="http://schemas.microsoft.com/office/drawing/2010/main">
                 <a:effectLst>
                   <a:outerShdw blurRad="63500" dist="35921" dir="2700000" algn="ctr" rotWithShape="0">
                     <a:schemeClr val="bg2"/>
@@ -13731,14 +13731,14 @@
           <a:effectLst/>
           <a:extLst>
             <a:ext uri="{909E8E84-426E-40dd-AFC4-6F175D3DCCD1}">
-              <a14:hiddenFill xmlns:a14="http://schemas.microsoft.com/office/drawing/2010/main" xmlns="">
+              <a14:hiddenFill xmlns="" xmlns:a14="http://schemas.microsoft.com/office/drawing/2010/main">
                 <a:solidFill>
                   <a:schemeClr val="accent1"/>
                 </a:solidFill>
               </a14:hiddenFill>
             </a:ext>
             <a:ext uri="{AF507438-7753-43e0-B8FC-AC1667EBCBE1}">
-              <a14:hiddenEffects xmlns:a14="http://schemas.microsoft.com/office/drawing/2010/main" xmlns="">
+              <a14:hiddenEffects xmlns="" xmlns:a14="http://schemas.microsoft.com/office/drawing/2010/main">
                 <a:effectLst>
                   <a:outerShdw blurRad="63500" dist="35921" dir="2700000" algn="ctr" rotWithShape="0">
                     <a:schemeClr val="bg2"/>
@@ -14867,14 +14867,14 @@
           <a:noFill/>
           <a:extLst>
             <a:ext uri="{909E8E84-426E-40dd-AFC4-6F175D3DCCD1}">
-              <a14:hiddenFill xmlns="" xmlns:a14="http://schemas.microsoft.com/office/drawing/2010/main">
+              <a14:hiddenFill xmlns:a14="http://schemas.microsoft.com/office/drawing/2010/main" xmlns="">
                 <a:solidFill>
                   <a:srgbClr val="FFFFFF"/>
                 </a:solidFill>
               </a14:hiddenFill>
             </a:ext>
             <a:ext uri="{91240B29-F687-4f45-9708-019B960494DF}">
-              <a14:hiddenLine xmlns="" xmlns:a14="http://schemas.microsoft.com/office/drawing/2010/main" w="9525">
+              <a14:hiddenLine xmlns:a14="http://schemas.microsoft.com/office/drawing/2010/main" xmlns="" w="9525">
                 <a:solidFill>
                   <a:srgbClr val="000000"/>
                 </a:solidFill>
@@ -15302,7 +15302,7 @@
           </a:ln>
           <a:extLst>
             <a:ext uri="{91240B29-F687-4f45-9708-019B960494DF}">
-              <a14:hiddenLine xmlns:a14="http://schemas.microsoft.com/office/drawing/2010/main" xmlns="" w="12700" cap="sq">
+              <a14:hiddenLine xmlns="" xmlns:a14="http://schemas.microsoft.com/office/drawing/2010/main" w="12700" cap="sq">
                 <a:solidFill>
                   <a:srgbClr val="000000"/>
                 </a:solidFill>
@@ -15463,7 +15463,7 @@
           </a:ln>
           <a:extLst>
             <a:ext uri="{91240B29-F687-4f45-9708-019B960494DF}">
-              <a14:hiddenLine xmlns:a14="http://schemas.microsoft.com/office/drawing/2010/main" xmlns="" w="12700" cap="sq">
+              <a14:hiddenLine xmlns="" xmlns:a14="http://schemas.microsoft.com/office/drawing/2010/main" w="12700" cap="sq">
                 <a:solidFill>
                   <a:srgbClr val="000000"/>
                 </a:solidFill>
@@ -15624,7 +15624,7 @@
           </a:ln>
           <a:extLst>
             <a:ext uri="{91240B29-F687-4f45-9708-019B960494DF}">
-              <a14:hiddenLine xmlns:a14="http://schemas.microsoft.com/office/drawing/2010/main" xmlns="" w="12700" cap="sq">
+              <a14:hiddenLine xmlns="" xmlns:a14="http://schemas.microsoft.com/office/drawing/2010/main" w="12700" cap="sq">
                 <a:solidFill>
                   <a:srgbClr val="000000"/>
                 </a:solidFill>
